--- a/assets/pptx/catalog-479.pptx
+++ b/assets/pptx/catalog-479.pptx
@@ -3311,7 +3311,7 @@
                 <a:ea typeface="Ebrima"/>
                 <a:cs typeface="Ebrima"/>
               </a:rPr>
-              <a:t>የተጣለውን ምንኛ አነሳኸው (2x)</a:t>
+              <a:t>የተጣለውን ምንኛ አነሳኸው 2x</a:t>
             </a:r>
           </a:p>
         </p:txBody>
@@ -3378,7 +3378,7 @@
                 <a:ea typeface="Ebrima"/>
                 <a:cs typeface="Ebrima"/>
               </a:rPr>
-              <a:t>ረድኤቴ አንተ አይደለህም ዎይ (4x)</a:t>
+              <a:t>ረድኤቴ አንተ አይደለህም ዎይ 4x</a:t>
             </a:r>
           </a:p>
         </p:txBody>
@@ -3463,7 +3463,7 @@
                 <a:ea typeface="Ebrima"/>
                 <a:cs typeface="Ebrima"/>
               </a:rPr>
-              <a:t>ባለውለታዬ ባለውለታዬ ባለውለታዬ (2x)</a:t>
+              <a:t>ባለውለታዬ ባለውለታዬ ባለውለታዬ 2x</a:t>
             </a:r>
           </a:p>
         </p:txBody>
@@ -3705,7 +3705,7 @@
                 <a:ea typeface="Ebrima"/>
                 <a:cs typeface="Ebrima"/>
               </a:rPr>
-              <a:t>ታጠግባለህ ኦሆ ታጠግባለህ አሃ (2x)</a:t>
+              <a:t>ታጠግባለህ ኦሆ ታጠግባለህ አሃ 2x</a:t>
             </a:r>
           </a:p>
         </p:txBody>
@@ -3826,7 +3826,7 @@
                 <a:ea typeface="Ebrima"/>
                 <a:cs typeface="Ebrima"/>
               </a:rPr>
-              <a:t>ዓይኔም አየችው ጌታ ይሄ ነው (3x)</a:t>
+              <a:t>ዓይኔም አየችው ጌታ ይሄ ነው 3x</a:t>
             </a:r>
           </a:p>
           <a:p>
@@ -3929,7 +3929,7 @@
                 <a:ea typeface="Ebrima"/>
                 <a:cs typeface="Ebrima"/>
               </a:rPr>
-              <a:t>እግዚአብሔር ሲሰራ አንድ ቃል ያበቃል (2x)</a:t>
+              <a:t>እግዚአብሔር ሲሰራ አንድ ቃል ያበቃል 2x</a:t>
             </a:r>
           </a:p>
         </p:txBody>
@@ -4256,7 +4256,7 @@
                 <a:ea typeface="Ebrima"/>
                 <a:cs typeface="Ebrima"/>
               </a:rPr>
-              <a:t>ለአንተ የምሰጠውን መስዋት አድርጌ (2x)</a:t>
+              <a:t>ለአንተ የምሰጠውን መስዋት አድርጌ 2x</a:t>
             </a:r>
           </a:p>
         </p:txBody>
@@ -4359,7 +4359,7 @@
                 <a:ea typeface="Ebrima"/>
                 <a:cs typeface="Ebrima"/>
               </a:rPr>
-              <a:t>ይሁንልህ ይሁንልህ (2x)</a:t>
+              <a:t>ይሁንልህ ይሁንልህ 2x</a:t>
             </a:r>
           </a:p>
         </p:txBody>
@@ -4444,7 +4444,7 @@
                 <a:ea typeface="Ebrima"/>
                 <a:cs typeface="Ebrima"/>
               </a:rPr>
-              <a:t>ለአንተ የምሰጠውን መስዋት አድርጌ (2x)</a:t>
+              <a:t>ለአንተ የምሰጠውን መስዋት አድርጌ 2x</a:t>
             </a:r>
           </a:p>
         </p:txBody>
@@ -4668,7 +4668,7 @@
                 <a:ea typeface="Ebrima"/>
                 <a:cs typeface="Ebrima"/>
               </a:rPr>
-              <a:t>የማይቆጠረው ተዓምራት (2x)</a:t>
+              <a:t>የማይቆጠረው ተዓምራት 2x</a:t>
             </a:r>
           </a:p>
           <a:p>
@@ -4686,7 +4686,7 @@
                 <a:ea typeface="Ebrima"/>
                 <a:cs typeface="Ebrima"/>
               </a:rPr>
-              <a:t>ሁሉን ያደረገው ማነው እግዚአብሔር ነው (2x)</a:t>
+              <a:t>ሁሉን ያደረገው ማነው እግዚአብሔር ነው 2x</a:t>
             </a:r>
           </a:p>
           <a:p>
@@ -4704,7 +4704,7 @@
                 <a:ea typeface="Ebrima"/>
                 <a:cs typeface="Ebrima"/>
               </a:rPr>
-              <a:t>ይህ የሰራ ማነው እግዚአብሔር ነው አሃ (2x)</a:t>
+              <a:t>ይህ የሰራ ማነው እግዚአብሔር ነው አሃ 2x</a:t>
             </a:r>
           </a:p>
         </p:txBody>
@@ -4771,7 +4771,7 @@
                 <a:ea typeface="Ebrima"/>
                 <a:cs typeface="Ebrima"/>
               </a:rPr>
-              <a:t>ክብር ሁሉ ለእርሱ ይሁን (4x)</a:t>
+              <a:t>ክብር ሁሉ ለእርሱ ይሁን 4x</a:t>
             </a:r>
           </a:p>
         </p:txBody>
@@ -4856,7 +4856,7 @@
                 <a:ea typeface="Ebrima"/>
                 <a:cs typeface="Ebrima"/>
               </a:rPr>
-              <a:t>ለአንተ የምሰጠውን መስዋት አድርጌ (2x)</a:t>
+              <a:t>ለአንተ የምሰጠውን መስዋት አድርጌ 2x</a:t>
             </a:r>
           </a:p>
         </p:txBody>
